--- a/classes/parte-6-analisis-de-malware/154-malware-en-linux/clase-154-presentacion.pptx
+++ b/classes/parte-6-analisis-de-malware/154-malware-en-linux/clase-154-presentacion.pptx
@@ -3821,6 +3821,21 @@
                 </a:solidFill>
               </a:rPr>
               <a:t>•  MITRE ATT&amp;CK — Linux. &lt;https://attack.mitre.org/matrices/enterprise/linux/&gt;</a:t>
+            </a:r>
+          </a:p>
+          <a:p>
+            <a:pPr>
+              <a:spcAft>
+                <a:spcPts val="600"/>
+              </a:spcAft>
+            </a:pPr>
+            <a:r>
+              <a:rPr sz="1500">
+                <a:solidFill>
+                  <a:srgbClr val="22282E"/>
+                </a:solidFill>
+              </a:rPr>
+              <a:t>•  FBI — Booter and Stresser Services. &lt;https://www.fbi.gov/contact-us/field-offices/anchorage/fbi-intensify-efforts-to-combat-illegal-ddos-attacks&gt;</a:t>
             </a:r>
           </a:p>
         </p:txBody>
